--- a/slides/earnings_discontinuity.pptx
+++ b/slides/earnings_discontinuity.pptx
@@ -12032,7 +12032,7 @@
                 </a:solidFill>
                 <a:latin typeface="Calibri"/>
               </a:rPr>
-              <a:t>github.com/astronomy-lover/earnings-discontinuity — Python 3.13, pandas, numpy, scipy, matplotlib. The cleaned panel is committed as parquet, so the notebooks run without touching SEC servers.</a:t>
+              <a:t>github.com/riddhi-shedge/earnings-discontinuity — Python 3.13, pandas, numpy, scipy, matplotlib. The cleaned panel is committed as parquet, so the notebooks run without touching SEC servers.</a:t>
             </a:r>
           </a:p>
           <a:p>
